--- a/src/ppt-super/assets/tpl-99-analysis-solution-split/template.pptx
+++ b/src/ppt-super/assets/tpl-99-analysis-solution-split/template.pptx
@@ -3136,7 +3136,14 @@
           <a:bodyPr rtlCol="0" anchor="ctr"/>
           <a:lstStyle/>
           <a:p>
-            <a:pPr algn="ctr"/>
+            <a:pPr algn="ctr">
+              <a:spcBef>
+                <a:spcPts val="0"/>
+              </a:spcBef>
+              <a:spcAft>
+                <a:spcPts val="0"/>
+              </a:spcAft>
+            </a:pPr>
           </a:p>
         </p:txBody>
       </p:sp>
@@ -3166,14 +3173,21 @@
               <a:lnSpc>
                 <a:spcPct val="112000"/>
               </a:lnSpc>
+              <a:spcBef>
+                <a:spcPts val="0"/>
+              </a:spcBef>
+              <a:spcAft>
+                <a:spcPts val="0"/>
+              </a:spcAft>
             </a:pPr>
             <a:r>
-              <a:rPr sz="1800" b="1" i="0">
+              <a:rPr sz="1800" b="1" i="0" lang="zh-CN" altLang="zh-CN">
                 <a:solidFill>
                   <a:srgbClr val="FFFFFF"/>
                 </a:solidFill>
                 <a:latin typeface="Microsoft YaHei"/>
                 <a:ea typeface="Microsoft YaHei"/>
+                <a:cs typeface="Microsoft YaHei"/>
               </a:rPr>
               <a:t>5G-A</a:t>
             </a:r>
@@ -3206,14 +3220,21 @@
               <a:lnSpc>
                 <a:spcPct val="112000"/>
               </a:lnSpc>
+              <a:spcBef>
+                <a:spcPts val="0"/>
+              </a:spcBef>
+              <a:spcAft>
+                <a:spcPts val="0"/>
+              </a:spcAft>
             </a:pPr>
             <a:r>
-              <a:rPr sz="2500" b="1" i="0">
+              <a:rPr sz="2500" b="1" i="0" lang="zh-CN" altLang="zh-CN">
                 <a:solidFill>
                   <a:srgbClr val="B90A0A"/>
                 </a:solidFill>
                 <a:latin typeface="Microsoft YaHei"/>
                 <a:ea typeface="Microsoft YaHei"/>
+                <a:cs typeface="Microsoft YaHei"/>
               </a:rPr>
               <a:t>上下行联合优化: 上行容量 +20% @ 下行性能微损</a:t>
             </a:r>
@@ -3334,7 +3355,14 @@
           <a:bodyPr rtlCol="0" anchor="ctr"/>
           <a:lstStyle/>
           <a:p>
-            <a:pPr algn="ctr"/>
+            <a:pPr algn="ctr">
+              <a:spcBef>
+                <a:spcPts val="0"/>
+              </a:spcBef>
+              <a:spcAft>
+                <a:spcPts val="0"/>
+              </a:spcAft>
+            </a:pPr>
           </a:p>
         </p:txBody>
       </p:sp>
@@ -3364,14 +3392,21 @@
               <a:lnSpc>
                 <a:spcPct val="112000"/>
               </a:lnSpc>
+              <a:spcBef>
+                <a:spcPts val="0"/>
+              </a:spcBef>
+              <a:spcAft>
+                <a:spcPts val="0"/>
+              </a:spcAft>
             </a:pPr>
             <a:r>
-              <a:rPr sz="1350" b="1" i="0">
+              <a:rPr sz="1350" b="1" i="0" lang="zh-CN" altLang="zh-CN">
                 <a:solidFill>
                   <a:srgbClr val="262626"/>
                 </a:solidFill>
                 <a:latin typeface="Microsoft YaHei"/>
                 <a:ea typeface="Microsoft YaHei"/>
+                <a:cs typeface="Microsoft YaHei"/>
               </a:rPr>
               <a:t>一、背景与价值分析</a:t>
             </a:r>
@@ -3404,14 +3439,21 @@
               <a:lnSpc>
                 <a:spcPct val="115000"/>
               </a:lnSpc>
+              <a:spcBef>
+                <a:spcPts val="0"/>
+              </a:spcBef>
+              <a:spcAft>
+                <a:spcPts val="0"/>
+              </a:spcAft>
             </a:pPr>
             <a:r>
-              <a:rPr sz="1000" b="0" i="0">
+              <a:rPr sz="1000" b="0" i="0" lang="zh-CN" altLang="zh-CN">
                 <a:solidFill>
                   <a:srgbClr val="262626"/>
                 </a:solidFill>
                 <a:latin typeface="Microsoft YaHei"/>
                 <a:ea typeface="Microsoft YaHei"/>
+                <a:cs typeface="Microsoft YaHei"/>
               </a:rPr>
               <a:t>5G 系统设计采用上下行半静态配比, 上行受限于下行资源分配; 同时控制信道 (PDCCH) 需占用上行时频资源, 在高负载下与数据信道争抢, 上行可用资源被进一步压缩。传统调度上下行相互独立, 缺乏面向上行需求的动态协同, 上行能力难以充分释放, 成为制约上行体验的结构性瓶颈。</a:t>
             </a:r>
@@ -3461,7 +3503,14 @@
           <a:bodyPr rtlCol="0" anchor="ctr"/>
           <a:lstStyle/>
           <a:p>
-            <a:pPr algn="ctr"/>
+            <a:pPr algn="ctr">
+              <a:spcBef>
+                <a:spcPts val="0"/>
+              </a:spcBef>
+              <a:spcAft>
+                <a:spcPts val="0"/>
+              </a:spcAft>
+            </a:pPr>
           </a:p>
         </p:txBody>
       </p:sp>
@@ -3509,7 +3558,14 @@
           <a:bodyPr rtlCol="0" anchor="ctr"/>
           <a:lstStyle/>
           <a:p>
-            <a:pPr algn="ctr"/>
+            <a:pPr algn="ctr">
+              <a:spcBef>
+                <a:spcPts val="0"/>
+              </a:spcBef>
+              <a:spcAft>
+                <a:spcPts val="0"/>
+              </a:spcAft>
+            </a:pPr>
           </a:p>
         </p:txBody>
       </p:sp>
@@ -3611,14 +3667,21 @@
               <a:lnSpc>
                 <a:spcPct val="112000"/>
               </a:lnSpc>
+              <a:spcBef>
+                <a:spcPts val="0"/>
+              </a:spcBef>
+              <a:spcAft>
+                <a:spcPts val="0"/>
+              </a:spcAft>
             </a:pPr>
             <a:r>
-              <a:rPr sz="1100" b="0" i="0">
+              <a:rPr sz="1100" b="0" i="0" lang="zh-CN" altLang="zh-CN">
                 <a:solidFill>
                   <a:srgbClr val="595959"/>
                 </a:solidFill>
                 <a:latin typeface="Microsoft YaHei"/>
                 <a:ea typeface="Microsoft YaHei"/>
+                <a:cs typeface="Microsoft YaHei"/>
               </a:rPr>
               <a:t>AI 配图区</a:t>
             </a:r>
@@ -3665,7 +3728,14 @@
           <a:bodyPr rtlCol="0" anchor="ctr"/>
           <a:lstStyle/>
           <a:p>
-            <a:pPr algn="ctr"/>
+            <a:pPr algn="ctr">
+              <a:spcBef>
+                <a:spcPts val="0"/>
+              </a:spcBef>
+              <a:spcAft>
+                <a:spcPts val="0"/>
+              </a:spcAft>
+            </a:pPr>
           </a:p>
         </p:txBody>
       </p:sp>
@@ -3709,7 +3779,14 @@
           <a:bodyPr rtlCol="0" anchor="ctr"/>
           <a:lstStyle/>
           <a:p>
-            <a:pPr algn="ctr"/>
+            <a:pPr algn="ctr">
+              <a:spcBef>
+                <a:spcPts val="0"/>
+              </a:spcBef>
+              <a:spcAft>
+                <a:spcPts val="0"/>
+              </a:spcAft>
+            </a:pPr>
           </a:p>
         </p:txBody>
       </p:sp>
@@ -3739,14 +3816,21 @@
               <a:lnSpc>
                 <a:spcPct val="112000"/>
               </a:lnSpc>
+              <a:spcBef>
+                <a:spcPts val="0"/>
+              </a:spcBef>
+              <a:spcAft>
+                <a:spcPts val="0"/>
+              </a:spcAft>
             </a:pPr>
             <a:r>
-              <a:rPr sz="1350" b="1" i="0">
+              <a:rPr sz="1350" b="1" i="0" lang="zh-CN" altLang="zh-CN">
                 <a:solidFill>
                   <a:srgbClr val="262626"/>
                 </a:solidFill>
                 <a:latin typeface="Microsoft YaHei"/>
                 <a:ea typeface="Microsoft YaHei"/>
+                <a:cs typeface="Microsoft YaHei"/>
               </a:rPr>
               <a:t>二、背景分析（现状与证据）</a:t>
             </a:r>
@@ -3761,8 +3845,8 @@
         </p:nvSpPr>
         <p:spPr>
           <a:xfrm>
-            <a:off x="393700" y="3556000"/>
-            <a:ext cx="5207000" cy="368300"/>
+            <a:off x="376237" y="3556000"/>
+            <a:ext cx="5241925" cy="368300"/>
           </a:xfrm>
           <a:prstGeom prst="rect">
             <a:avLst/>
@@ -3779,14 +3863,21 @@
               <a:lnSpc>
                 <a:spcPct val="115000"/>
               </a:lnSpc>
+              <a:spcBef>
+                <a:spcPts val="0"/>
+              </a:spcBef>
+              <a:spcAft>
+                <a:spcPts val="0"/>
+              </a:spcAft>
             </a:pPr>
             <a:r>
-              <a:rPr sz="980" b="0" i="0">
+              <a:rPr sz="980" b="0" i="0" lang="zh-CN" altLang="zh-CN">
                 <a:solidFill>
                   <a:srgbClr val="262626"/>
                 </a:solidFill>
                 <a:latin typeface="Microsoft YaHei"/>
                 <a:ea typeface="Microsoft YaHei"/>
+                <a:cs typeface="Microsoft YaHei"/>
               </a:rPr>
               <a:t>现网与仿真数据分析表明: 随负载升高, 上行吞吐快速衰减, 高负载小区上行容量较轻载显著下降, 上行时延抖动加剧, 印证了上下行割裂调度下的上行瓶颈。</a:t>
             </a:r>
@@ -3836,7 +3927,14 @@
           <a:bodyPr rtlCol="0" anchor="ctr"/>
           <a:lstStyle/>
           <a:p>
-            <a:pPr algn="ctr"/>
+            <a:pPr algn="ctr">
+              <a:spcBef>
+                <a:spcPts val="0"/>
+              </a:spcBef>
+              <a:spcAft>
+                <a:spcPts val="0"/>
+              </a:spcAft>
+            </a:pPr>
           </a:p>
         </p:txBody>
       </p:sp>
@@ -3884,7 +3982,14 @@
           <a:bodyPr rtlCol="0" anchor="ctr"/>
           <a:lstStyle/>
           <a:p>
-            <a:pPr algn="ctr"/>
+            <a:pPr algn="ctr">
+              <a:spcBef>
+                <a:spcPts val="0"/>
+              </a:spcBef>
+              <a:spcAft>
+                <a:spcPts val="0"/>
+              </a:spcAft>
+            </a:pPr>
           </a:p>
         </p:txBody>
       </p:sp>
@@ -3986,14 +4091,21 @@
               <a:lnSpc>
                 <a:spcPct val="112000"/>
               </a:lnSpc>
+              <a:spcBef>
+                <a:spcPts val="0"/>
+              </a:spcBef>
+              <a:spcAft>
+                <a:spcPts val="0"/>
+              </a:spcAft>
             </a:pPr>
             <a:r>
-              <a:rPr sz="1100" b="0" i="0">
+              <a:rPr sz="1100" b="0" i="0" lang="zh-CN" altLang="zh-CN">
                 <a:solidFill>
                   <a:srgbClr val="595959"/>
                 </a:solidFill>
                 <a:latin typeface="Microsoft YaHei"/>
                 <a:ea typeface="Microsoft YaHei"/>
+                <a:cs typeface="Microsoft YaHei"/>
               </a:rPr>
               <a:t>AI 配图区</a:t>
             </a:r>
@@ -4043,7 +4155,14 @@
           <a:bodyPr rtlCol="0" anchor="ctr"/>
           <a:lstStyle/>
           <a:p>
-            <a:pPr algn="ctr"/>
+            <a:pPr algn="ctr">
+              <a:spcBef>
+                <a:spcPts val="0"/>
+              </a:spcBef>
+              <a:spcAft>
+                <a:spcPts val="0"/>
+              </a:spcAft>
+            </a:pPr>
           </a:p>
         </p:txBody>
       </p:sp>
@@ -4091,7 +4210,14 @@
           <a:bodyPr rtlCol="0" anchor="ctr"/>
           <a:lstStyle/>
           <a:p>
-            <a:pPr algn="ctr"/>
+            <a:pPr algn="ctr">
+              <a:spcBef>
+                <a:spcPts val="0"/>
+              </a:spcBef>
+              <a:spcAft>
+                <a:spcPts val="0"/>
+              </a:spcAft>
+            </a:pPr>
           </a:p>
         </p:txBody>
       </p:sp>
@@ -4193,14 +4319,21 @@
               <a:lnSpc>
                 <a:spcPct val="112000"/>
               </a:lnSpc>
+              <a:spcBef>
+                <a:spcPts val="0"/>
+              </a:spcBef>
+              <a:spcAft>
+                <a:spcPts val="0"/>
+              </a:spcAft>
             </a:pPr>
             <a:r>
-              <a:rPr sz="1100" b="0" i="0">
+              <a:rPr sz="1100" b="0" i="0" lang="zh-CN" altLang="zh-CN">
                 <a:solidFill>
                   <a:srgbClr val="595959"/>
                 </a:solidFill>
                 <a:latin typeface="Microsoft YaHei"/>
                 <a:ea typeface="Microsoft YaHei"/>
+                <a:cs typeface="Microsoft YaHei"/>
               </a:rPr>
               <a:t>AI 配图区</a:t>
             </a:r>
@@ -4233,14 +4366,21 @@
               <a:lnSpc>
                 <a:spcPct val="112000"/>
               </a:lnSpc>
+              <a:spcBef>
+                <a:spcPts val="0"/>
+              </a:spcBef>
+              <a:spcAft>
+                <a:spcPts val="0"/>
+              </a:spcAft>
             </a:pPr>
             <a:r>
-              <a:rPr sz="900" b="0" i="0">
+              <a:rPr sz="900" b="0" i="0" lang="zh-CN" altLang="zh-CN">
                 <a:solidFill>
                   <a:srgbClr val="595959"/>
                 </a:solidFill>
                 <a:latin typeface="Microsoft YaHei"/>
                 <a:ea typeface="Microsoft YaHei"/>
+                <a:cs typeface="Microsoft YaHei"/>
               </a:rPr>
               <a:t>数据来源: 现网实测 + 系统级仿真, 典型高负载场景</a:t>
             </a:r>
@@ -4287,7 +4427,14 @@
           <a:bodyPr rtlCol="0" anchor="ctr"/>
           <a:lstStyle/>
           <a:p>
-            <a:pPr algn="ctr"/>
+            <a:pPr algn="ctr">
+              <a:spcBef>
+                <a:spcPts val="0"/>
+              </a:spcBef>
+              <a:spcAft>
+                <a:spcPts val="0"/>
+              </a:spcAft>
+            </a:pPr>
           </a:p>
         </p:txBody>
       </p:sp>
@@ -4317,14 +4464,21 @@
               <a:lnSpc>
                 <a:spcPct val="112000"/>
               </a:lnSpc>
+              <a:spcBef>
+                <a:spcPts val="0"/>
+              </a:spcBef>
+              <a:spcAft>
+                <a:spcPts val="0"/>
+              </a:spcAft>
             </a:pPr>
             <a:r>
-              <a:rPr sz="1350" b="1" i="0">
+              <a:rPr sz="1350" b="1" i="0" lang="zh-CN" altLang="zh-CN">
                 <a:solidFill>
                   <a:srgbClr val="262626"/>
                 </a:solidFill>
                 <a:latin typeface="Microsoft YaHei"/>
                 <a:ea typeface="Microsoft YaHei"/>
+                <a:cs typeface="Microsoft YaHei"/>
               </a:rPr>
               <a:t>三、解决方案与关键挑战</a:t>
             </a:r>
@@ -4375,7 +4529,14 @@
           <a:bodyPr rtlCol="0" anchor="ctr"/>
           <a:lstStyle/>
           <a:p>
-            <a:pPr algn="ctr"/>
+            <a:pPr algn="ctr">
+              <a:spcBef>
+                <a:spcPts val="0"/>
+              </a:spcBef>
+              <a:spcAft>
+                <a:spcPts val="0"/>
+              </a:spcAft>
+            </a:pPr>
           </a:p>
         </p:txBody>
       </p:sp>
@@ -4419,7 +4580,14 @@
           <a:bodyPr rtlCol="0" anchor="ctr"/>
           <a:lstStyle/>
           <a:p>
-            <a:pPr algn="ctr"/>
+            <a:pPr algn="ctr">
+              <a:spcBef>
+                <a:spcPts val="0"/>
+              </a:spcBef>
+              <a:spcAft>
+                <a:spcPts val="0"/>
+              </a:spcAft>
+            </a:pPr>
           </a:p>
         </p:txBody>
       </p:sp>
@@ -4449,14 +4617,21 @@
               <a:lnSpc>
                 <a:spcPct val="112000"/>
               </a:lnSpc>
+              <a:spcBef>
+                <a:spcPts val="0"/>
+              </a:spcBef>
+              <a:spcAft>
+                <a:spcPts val="0"/>
+              </a:spcAft>
             </a:pPr>
             <a:r>
-              <a:rPr sz="950" b="1" i="0">
+              <a:rPr sz="950" b="1" i="0" lang="zh-CN" altLang="zh-CN">
                 <a:solidFill>
                   <a:srgbClr val="FFFFFF"/>
                 </a:solidFill>
                 <a:latin typeface="Microsoft YaHei"/>
                 <a:ea typeface="Microsoft YaHei"/>
+                <a:cs typeface="Microsoft YaHei"/>
               </a:rPr>
               <a:t>1</a:t>
             </a:r>
@@ -4489,14 +4664,21 @@
               <a:lnSpc>
                 <a:spcPct val="112000"/>
               </a:lnSpc>
+              <a:spcBef>
+                <a:spcPts val="0"/>
+              </a:spcBef>
+              <a:spcAft>
+                <a:spcPts val="0"/>
+              </a:spcAft>
             </a:pPr>
             <a:r>
-              <a:rPr sz="1300" b="1" i="0">
+              <a:rPr sz="1300" b="1" i="0" lang="zh-CN" altLang="zh-CN">
                 <a:solidFill>
                   <a:srgbClr val="262626"/>
                 </a:solidFill>
                 <a:latin typeface="Microsoft YaHei"/>
                 <a:ea typeface="Microsoft YaHei"/>
+                <a:cs typeface="Microsoft YaHei"/>
               </a:rPr>
               <a:t>上下行联合调度</a:t>
             </a:r>
@@ -4546,7 +4728,14 @@
           <a:bodyPr rtlCol="0" anchor="ctr"/>
           <a:lstStyle/>
           <a:p>
-            <a:pPr algn="ctr"/>
+            <a:pPr algn="ctr">
+              <a:spcBef>
+                <a:spcPts val="0"/>
+              </a:spcBef>
+              <a:spcAft>
+                <a:spcPts val="0"/>
+              </a:spcAft>
+            </a:pPr>
           </a:p>
         </p:txBody>
       </p:sp>
@@ -4594,7 +4783,14 @@
           <a:bodyPr rtlCol="0" anchor="ctr"/>
           <a:lstStyle/>
           <a:p>
-            <a:pPr algn="ctr"/>
+            <a:pPr algn="ctr">
+              <a:spcBef>
+                <a:spcPts val="0"/>
+              </a:spcBef>
+              <a:spcAft>
+                <a:spcPts val="0"/>
+              </a:spcAft>
+            </a:pPr>
           </a:p>
         </p:txBody>
       </p:sp>
@@ -4696,14 +4892,21 @@
               <a:lnSpc>
                 <a:spcPct val="112000"/>
               </a:lnSpc>
+              <a:spcBef>
+                <a:spcPts val="0"/>
+              </a:spcBef>
+              <a:spcAft>
+                <a:spcPts val="0"/>
+              </a:spcAft>
             </a:pPr>
             <a:r>
-              <a:rPr sz="1100" b="0" i="0">
+              <a:rPr sz="1100" b="0" i="0" lang="zh-CN" altLang="zh-CN">
                 <a:solidFill>
                   <a:srgbClr val="595959"/>
                 </a:solidFill>
                 <a:latin typeface="Microsoft YaHei"/>
                 <a:ea typeface="Microsoft YaHei"/>
+                <a:cs typeface="Microsoft YaHei"/>
               </a:rPr>
               <a:t>AI 配图区</a:t>
             </a:r>
@@ -4736,14 +4939,21 @@
               <a:lnSpc>
                 <a:spcPct val="110000"/>
               </a:lnSpc>
+              <a:spcBef>
+                <a:spcPts val="0"/>
+              </a:spcBef>
+              <a:spcAft>
+                <a:spcPts val="0"/>
+              </a:spcAft>
             </a:pPr>
             <a:r>
-              <a:rPr sz="940" b="0" i="0">
+              <a:rPr sz="940" b="0" i="0" lang="zh-CN" altLang="zh-CN">
                 <a:solidFill>
                   <a:srgbClr val="262626"/>
                 </a:solidFill>
                 <a:latin typeface="Microsoft YaHei"/>
                 <a:ea typeface="Microsoft YaHei"/>
+                <a:cs typeface="Microsoft YaHei"/>
               </a:rPr>
               <a:t>动态感知上下行需求,</a:t>
             </a:r>
@@ -4753,14 +4963,21 @@
               <a:lnSpc>
                 <a:spcPct val="110000"/>
               </a:lnSpc>
+              <a:spcBef>
+                <a:spcPts val="0"/>
+              </a:spcBef>
+              <a:spcAft>
+                <a:spcPts val="0"/>
+              </a:spcAft>
             </a:pPr>
             <a:r>
-              <a:rPr sz="940" b="0" i="0">
+              <a:rPr sz="940" b="0" i="0" lang="zh-CN" altLang="zh-CN">
                 <a:solidFill>
                   <a:srgbClr val="262626"/>
                 </a:solidFill>
                 <a:latin typeface="Microsoft YaHei"/>
                 <a:ea typeface="Microsoft YaHei"/>
+                <a:cs typeface="Microsoft YaHei"/>
               </a:rPr>
               <a:t>联合分配时频资源</a:t>
             </a:r>
@@ -4807,7 +5024,14 @@
           <a:bodyPr rtlCol="0" anchor="ctr"/>
           <a:lstStyle/>
           <a:p>
-            <a:pPr algn="ctr"/>
+            <a:pPr algn="ctr">
+              <a:spcBef>
+                <a:spcPts val="0"/>
+              </a:spcBef>
+              <a:spcAft>
+                <a:spcPts val="0"/>
+              </a:spcAft>
+            </a:pPr>
           </a:p>
         </p:txBody>
       </p:sp>
@@ -4819,8 +5043,8 @@
         </p:nvSpPr>
         <p:spPr>
           <a:xfrm>
-            <a:off x="7797800" y="2006600"/>
-            <a:ext cx="215900" cy="215900"/>
+            <a:off x="7793037" y="1913508"/>
+            <a:ext cx="225425" cy="402082"/>
           </a:xfrm>
           <a:prstGeom prst="rect">
             <a:avLst/>
@@ -4837,14 +5061,21 @@
               <a:lnSpc>
                 <a:spcPct val="112000"/>
               </a:lnSpc>
+              <a:spcBef>
+                <a:spcPts val="0"/>
+              </a:spcBef>
+              <a:spcAft>
+                <a:spcPts val="0"/>
+              </a:spcAft>
             </a:pPr>
             <a:r>
-              <a:rPr sz="2400" b="1" i="0">
+              <a:rPr sz="2400" b="1" i="0" lang="zh-CN" altLang="zh-CN">
                 <a:solidFill>
                   <a:srgbClr val="FFFFFF"/>
                 </a:solidFill>
                 <a:latin typeface="Microsoft YaHei"/>
                 <a:ea typeface="Microsoft YaHei"/>
+                <a:cs typeface="Microsoft YaHei"/>
               </a:rPr>
               <a:t>›</a:t>
             </a:r>
@@ -4933,7 +5164,14 @@
           <a:bodyPr rtlCol="0" anchor="ctr"/>
           <a:lstStyle/>
           <a:p>
-            <a:pPr algn="ctr"/>
+            <a:pPr algn="ctr">
+              <a:spcBef>
+                <a:spcPts val="0"/>
+              </a:spcBef>
+              <a:spcAft>
+                <a:spcPts val="0"/>
+              </a:spcAft>
+            </a:pPr>
           </a:p>
         </p:txBody>
       </p:sp>
@@ -4977,7 +5215,14 @@
           <a:bodyPr rtlCol="0" anchor="ctr"/>
           <a:lstStyle/>
           <a:p>
-            <a:pPr algn="ctr"/>
+            <a:pPr algn="ctr">
+              <a:spcBef>
+                <a:spcPts val="0"/>
+              </a:spcBef>
+              <a:spcAft>
+                <a:spcPts val="0"/>
+              </a:spcAft>
+            </a:pPr>
           </a:p>
         </p:txBody>
       </p:sp>
@@ -5007,14 +5252,21 @@
               <a:lnSpc>
                 <a:spcPct val="112000"/>
               </a:lnSpc>
+              <a:spcBef>
+                <a:spcPts val="0"/>
+              </a:spcBef>
+              <a:spcAft>
+                <a:spcPts val="0"/>
+              </a:spcAft>
             </a:pPr>
             <a:r>
-              <a:rPr sz="950" b="1" i="0">
+              <a:rPr sz="950" b="1" i="0" lang="zh-CN" altLang="zh-CN">
                 <a:solidFill>
                   <a:srgbClr val="FFFFFF"/>
                 </a:solidFill>
                 <a:latin typeface="Microsoft YaHei"/>
                 <a:ea typeface="Microsoft YaHei"/>
+                <a:cs typeface="Microsoft YaHei"/>
               </a:rPr>
               <a:t>2</a:t>
             </a:r>
@@ -5047,14 +5299,21 @@
               <a:lnSpc>
                 <a:spcPct val="112000"/>
               </a:lnSpc>
+              <a:spcBef>
+                <a:spcPts val="0"/>
+              </a:spcBef>
+              <a:spcAft>
+                <a:spcPts val="0"/>
+              </a:spcAft>
             </a:pPr>
             <a:r>
-              <a:rPr sz="1300" b="1" i="0">
+              <a:rPr sz="1300" b="1" i="0" lang="zh-CN" altLang="zh-CN">
                 <a:solidFill>
                   <a:srgbClr val="262626"/>
                 </a:solidFill>
                 <a:latin typeface="Microsoft YaHei"/>
                 <a:ea typeface="Microsoft YaHei"/>
+                <a:cs typeface="Microsoft YaHei"/>
               </a:rPr>
               <a:t>控制/数据信道协同</a:t>
             </a:r>
@@ -5104,7 +5363,14 @@
           <a:bodyPr rtlCol="0" anchor="ctr"/>
           <a:lstStyle/>
           <a:p>
-            <a:pPr algn="ctr"/>
+            <a:pPr algn="ctr">
+              <a:spcBef>
+                <a:spcPts val="0"/>
+              </a:spcBef>
+              <a:spcAft>
+                <a:spcPts val="0"/>
+              </a:spcAft>
+            </a:pPr>
           </a:p>
         </p:txBody>
       </p:sp>
@@ -5152,7 +5418,14 @@
           <a:bodyPr rtlCol="0" anchor="ctr"/>
           <a:lstStyle/>
           <a:p>
-            <a:pPr algn="ctr"/>
+            <a:pPr algn="ctr">
+              <a:spcBef>
+                <a:spcPts val="0"/>
+              </a:spcBef>
+              <a:spcAft>
+                <a:spcPts val="0"/>
+              </a:spcAft>
+            </a:pPr>
           </a:p>
         </p:txBody>
       </p:sp>
@@ -5254,14 +5527,21 @@
               <a:lnSpc>
                 <a:spcPct val="112000"/>
               </a:lnSpc>
+              <a:spcBef>
+                <a:spcPts val="0"/>
+              </a:spcBef>
+              <a:spcAft>
+                <a:spcPts val="0"/>
+              </a:spcAft>
             </a:pPr>
             <a:r>
-              <a:rPr sz="1100" b="0" i="0">
+              <a:rPr sz="1100" b="0" i="0" lang="zh-CN" altLang="zh-CN">
                 <a:solidFill>
                   <a:srgbClr val="595959"/>
                 </a:solidFill>
                 <a:latin typeface="Microsoft YaHei"/>
                 <a:ea typeface="Microsoft YaHei"/>
+                <a:cs typeface="Microsoft YaHei"/>
               </a:rPr>
               <a:t>AI 配图区</a:t>
             </a:r>
@@ -5294,14 +5574,21 @@
               <a:lnSpc>
                 <a:spcPct val="110000"/>
               </a:lnSpc>
+              <a:spcBef>
+                <a:spcPts val="0"/>
+              </a:spcBef>
+              <a:spcAft>
+                <a:spcPts val="0"/>
+              </a:spcAft>
             </a:pPr>
             <a:r>
-              <a:rPr sz="940" b="0" i="0">
+              <a:rPr sz="940" b="0" i="0" lang="zh-CN" altLang="zh-CN">
                 <a:solidFill>
                   <a:srgbClr val="262626"/>
                 </a:solidFill>
                 <a:latin typeface="Microsoft YaHei"/>
                 <a:ea typeface="Microsoft YaHei"/>
+                <a:cs typeface="Microsoft YaHei"/>
               </a:rPr>
               <a:t>PDCCH 资源自适应分配,</a:t>
             </a:r>
@@ -5311,14 +5598,21 @@
               <a:lnSpc>
                 <a:spcPct val="110000"/>
               </a:lnSpc>
+              <a:spcBef>
+                <a:spcPts val="0"/>
+              </a:spcBef>
+              <a:spcAft>
+                <a:spcPts val="0"/>
+              </a:spcAft>
             </a:pPr>
             <a:r>
-              <a:rPr sz="940" b="0" i="0">
+              <a:rPr sz="940" b="0" i="0" lang="zh-CN" altLang="zh-CN">
                 <a:solidFill>
                   <a:srgbClr val="262626"/>
                 </a:solidFill>
                 <a:latin typeface="Microsoft YaHei"/>
                 <a:ea typeface="Microsoft YaHei"/>
+                <a:cs typeface="Microsoft YaHei"/>
               </a:rPr>
               <a:t>降低上行控制开销</a:t>
             </a:r>
@@ -5365,7 +5659,14 @@
           <a:bodyPr rtlCol="0" anchor="ctr"/>
           <a:lstStyle/>
           <a:p>
-            <a:pPr algn="ctr"/>
+            <a:pPr algn="ctr">
+              <a:spcBef>
+                <a:spcPts val="0"/>
+              </a:spcBef>
+              <a:spcAft>
+                <a:spcPts val="0"/>
+              </a:spcAft>
+            </a:pPr>
           </a:p>
         </p:txBody>
       </p:sp>
@@ -5377,8 +5678,8 @@
         </p:nvSpPr>
         <p:spPr>
           <a:xfrm>
-            <a:off x="9753600" y="2006600"/>
-            <a:ext cx="215900" cy="215900"/>
+            <a:off x="9748837" y="1913508"/>
+            <a:ext cx="225425" cy="402082"/>
           </a:xfrm>
           <a:prstGeom prst="rect">
             <a:avLst/>
@@ -5395,14 +5696,21 @@
               <a:lnSpc>
                 <a:spcPct val="112000"/>
               </a:lnSpc>
+              <a:spcBef>
+                <a:spcPts val="0"/>
+              </a:spcBef>
+              <a:spcAft>
+                <a:spcPts val="0"/>
+              </a:spcAft>
             </a:pPr>
             <a:r>
-              <a:rPr sz="2400" b="1" i="0">
+              <a:rPr sz="2400" b="1" i="0" lang="zh-CN" altLang="zh-CN">
                 <a:solidFill>
                   <a:srgbClr val="FFFFFF"/>
                 </a:solidFill>
                 <a:latin typeface="Microsoft YaHei"/>
                 <a:ea typeface="Microsoft YaHei"/>
+                <a:cs typeface="Microsoft YaHei"/>
               </a:rPr>
               <a:t>›</a:t>
             </a:r>
@@ -5491,7 +5799,14 @@
           <a:bodyPr rtlCol="0" anchor="ctr"/>
           <a:lstStyle/>
           <a:p>
-            <a:pPr algn="ctr"/>
+            <a:pPr algn="ctr">
+              <a:spcBef>
+                <a:spcPts val="0"/>
+              </a:spcBef>
+              <a:spcAft>
+                <a:spcPts val="0"/>
+              </a:spcAft>
+            </a:pPr>
           </a:p>
         </p:txBody>
       </p:sp>
@@ -5535,7 +5850,14 @@
           <a:bodyPr rtlCol="0" anchor="ctr"/>
           <a:lstStyle/>
           <a:p>
-            <a:pPr algn="ctr"/>
+            <a:pPr algn="ctr">
+              <a:spcBef>
+                <a:spcPts val="0"/>
+              </a:spcBef>
+              <a:spcAft>
+                <a:spcPts val="0"/>
+              </a:spcAft>
+            </a:pPr>
           </a:p>
         </p:txBody>
       </p:sp>
@@ -5565,14 +5887,21 @@
               <a:lnSpc>
                 <a:spcPct val="112000"/>
               </a:lnSpc>
+              <a:spcBef>
+                <a:spcPts val="0"/>
+              </a:spcBef>
+              <a:spcAft>
+                <a:spcPts val="0"/>
+              </a:spcAft>
             </a:pPr>
             <a:r>
-              <a:rPr sz="950" b="1" i="0">
+              <a:rPr sz="950" b="1" i="0" lang="zh-CN" altLang="zh-CN">
                 <a:solidFill>
                   <a:srgbClr val="FFFFFF"/>
                 </a:solidFill>
                 <a:latin typeface="Microsoft YaHei"/>
                 <a:ea typeface="Microsoft YaHei"/>
+                <a:cs typeface="Microsoft YaHei"/>
               </a:rPr>
               <a:t>3</a:t>
             </a:r>
@@ -5605,14 +5934,21 @@
               <a:lnSpc>
                 <a:spcPct val="112000"/>
               </a:lnSpc>
+              <a:spcBef>
+                <a:spcPts val="0"/>
+              </a:spcBef>
+              <a:spcAft>
+                <a:spcPts val="0"/>
+              </a:spcAft>
             </a:pPr>
             <a:r>
-              <a:rPr sz="1300" b="1" i="0">
+              <a:rPr sz="1300" b="1" i="0" lang="zh-CN" altLang="zh-CN">
                 <a:solidFill>
                   <a:srgbClr val="262626"/>
                 </a:solidFill>
                 <a:latin typeface="Microsoft YaHei"/>
                 <a:ea typeface="Microsoft YaHei"/>
+                <a:cs typeface="Microsoft YaHei"/>
               </a:rPr>
               <a:t>上行优先动态优化</a:t>
             </a:r>
@@ -5662,7 +5998,14 @@
           <a:bodyPr rtlCol="0" anchor="ctr"/>
           <a:lstStyle/>
           <a:p>
-            <a:pPr algn="ctr"/>
+            <a:pPr algn="ctr">
+              <a:spcBef>
+                <a:spcPts val="0"/>
+              </a:spcBef>
+              <a:spcAft>
+                <a:spcPts val="0"/>
+              </a:spcAft>
+            </a:pPr>
           </a:p>
         </p:txBody>
       </p:sp>
@@ -5710,7 +6053,14 @@
           <a:bodyPr rtlCol="0" anchor="ctr"/>
           <a:lstStyle/>
           <a:p>
-            <a:pPr algn="ctr"/>
+            <a:pPr algn="ctr">
+              <a:spcBef>
+                <a:spcPts val="0"/>
+              </a:spcBef>
+              <a:spcAft>
+                <a:spcPts val="0"/>
+              </a:spcAft>
+            </a:pPr>
           </a:p>
         </p:txBody>
       </p:sp>
@@ -5812,14 +6162,21 @@
               <a:lnSpc>
                 <a:spcPct val="112000"/>
               </a:lnSpc>
+              <a:spcBef>
+                <a:spcPts val="0"/>
+              </a:spcBef>
+              <a:spcAft>
+                <a:spcPts val="0"/>
+              </a:spcAft>
             </a:pPr>
             <a:r>
-              <a:rPr sz="1100" b="0" i="0">
+              <a:rPr sz="1100" b="0" i="0" lang="zh-CN" altLang="zh-CN">
                 <a:solidFill>
                   <a:srgbClr val="595959"/>
                 </a:solidFill>
                 <a:latin typeface="Microsoft YaHei"/>
                 <a:ea typeface="Microsoft YaHei"/>
+                <a:cs typeface="Microsoft YaHei"/>
               </a:rPr>
               <a:t>AI 配图区</a:t>
             </a:r>
@@ -5852,14 +6209,21 @@
               <a:lnSpc>
                 <a:spcPct val="110000"/>
               </a:lnSpc>
+              <a:spcBef>
+                <a:spcPts val="0"/>
+              </a:spcBef>
+              <a:spcAft>
+                <a:spcPts val="0"/>
+              </a:spcAft>
             </a:pPr>
             <a:r>
-              <a:rPr sz="940" b="0" i="0">
+              <a:rPr sz="940" b="0" i="0" lang="zh-CN" altLang="zh-CN">
                 <a:solidFill>
                   <a:srgbClr val="262626"/>
                 </a:solidFill>
                 <a:latin typeface="Microsoft YaHei"/>
                 <a:ea typeface="Microsoft YaHei"/>
+                <a:cs typeface="Microsoft YaHei"/>
               </a:rPr>
               <a:t>优先级动态调整,</a:t>
             </a:r>
@@ -5869,14 +6233,21 @@
               <a:lnSpc>
                 <a:spcPct val="110000"/>
               </a:lnSpc>
+              <a:spcBef>
+                <a:spcPts val="0"/>
+              </a:spcBef>
+              <a:spcAft>
+                <a:spcPts val="0"/>
+              </a:spcAft>
             </a:pPr>
             <a:r>
-              <a:rPr sz="940" b="0" i="0">
+              <a:rPr sz="940" b="0" i="0" lang="zh-CN" altLang="zh-CN">
                 <a:solidFill>
                   <a:srgbClr val="262626"/>
                 </a:solidFill>
                 <a:latin typeface="Microsoft YaHei"/>
                 <a:ea typeface="Microsoft YaHei"/>
+                <a:cs typeface="Microsoft YaHei"/>
               </a:rPr>
               <a:t>保障关键业务体验</a:t>
             </a:r>
@@ -5961,7 +6332,14 @@
           <a:bodyPr rtlCol="0" anchor="ctr"/>
           <a:lstStyle/>
           <a:p>
-            <a:pPr algn="ctr"/>
+            <a:pPr algn="ctr">
+              <a:spcBef>
+                <a:spcPts val="0"/>
+              </a:spcBef>
+              <a:spcAft>
+                <a:spcPts val="0"/>
+              </a:spcAft>
+            </a:pPr>
           </a:p>
         </p:txBody>
       </p:sp>
@@ -6005,7 +6383,14 @@
           <a:bodyPr rtlCol="0" anchor="ctr"/>
           <a:lstStyle/>
           <a:p>
-            <a:pPr algn="ctr"/>
+            <a:pPr algn="ctr">
+              <a:spcBef>
+                <a:spcPts val="0"/>
+              </a:spcBef>
+              <a:spcAft>
+                <a:spcPts val="0"/>
+              </a:spcAft>
+            </a:pPr>
           </a:p>
         </p:txBody>
       </p:sp>
@@ -6035,14 +6420,21 @@
               <a:lnSpc>
                 <a:spcPct val="112000"/>
               </a:lnSpc>
+              <a:spcBef>
+                <a:spcPts val="0"/>
+              </a:spcBef>
+              <a:spcAft>
+                <a:spcPts val="0"/>
+              </a:spcAft>
             </a:pPr>
             <a:r>
-              <a:rPr sz="1350" b="1" i="0">
+              <a:rPr sz="1350" b="1" i="0" lang="zh-CN" altLang="zh-CN">
                 <a:solidFill>
                   <a:srgbClr val="262626"/>
                 </a:solidFill>
                 <a:latin typeface="Microsoft YaHei"/>
                 <a:ea typeface="Microsoft YaHei"/>
+                <a:cs typeface="Microsoft YaHei"/>
               </a:rPr>
               <a:t>四、整体方案架构</a:t>
             </a:r>
@@ -6092,7 +6484,14 @@
           <a:bodyPr rtlCol="0" anchor="ctr"/>
           <a:lstStyle/>
           <a:p>
-            <a:pPr algn="ctr"/>
+            <a:pPr algn="ctr">
+              <a:spcBef>
+                <a:spcPts val="0"/>
+              </a:spcBef>
+              <a:spcAft>
+                <a:spcPts val="0"/>
+              </a:spcAft>
+            </a:pPr>
           </a:p>
         </p:txBody>
       </p:sp>
@@ -6140,7 +6539,14 @@
           <a:bodyPr rtlCol="0" anchor="ctr"/>
           <a:lstStyle/>
           <a:p>
-            <a:pPr algn="ctr"/>
+            <a:pPr algn="ctr">
+              <a:spcBef>
+                <a:spcPts val="0"/>
+              </a:spcBef>
+              <a:spcAft>
+                <a:spcPts val="0"/>
+              </a:spcAft>
+            </a:pPr>
           </a:p>
         </p:txBody>
       </p:sp>
@@ -6242,14 +6648,21 @@
               <a:lnSpc>
                 <a:spcPct val="112000"/>
               </a:lnSpc>
+              <a:spcBef>
+                <a:spcPts val="0"/>
+              </a:spcBef>
+              <a:spcAft>
+                <a:spcPts val="0"/>
+              </a:spcAft>
             </a:pPr>
             <a:r>
-              <a:rPr sz="1100" b="0" i="0">
+              <a:rPr sz="1100" b="0" i="0" lang="zh-CN" altLang="zh-CN">
                 <a:solidFill>
                   <a:srgbClr val="595959"/>
                 </a:solidFill>
                 <a:latin typeface="Microsoft YaHei"/>
                 <a:ea typeface="Microsoft YaHei"/>
+                <a:cs typeface="Microsoft YaHei"/>
               </a:rPr>
               <a:t>AI 配图区</a:t>
             </a:r>
@@ -6300,7 +6713,14 @@
           <a:bodyPr rtlCol="0" anchor="ctr"/>
           <a:lstStyle/>
           <a:p>
-            <a:pPr algn="ctr"/>
+            <a:pPr algn="ctr">
+              <a:spcBef>
+                <a:spcPts val="0"/>
+              </a:spcBef>
+              <a:spcAft>
+                <a:spcPts val="0"/>
+              </a:spcAft>
+            </a:pPr>
           </a:p>
         </p:txBody>
       </p:sp>
@@ -6344,7 +6764,14 @@
           <a:bodyPr rtlCol="0" anchor="ctr"/>
           <a:lstStyle/>
           <a:p>
-            <a:pPr algn="ctr"/>
+            <a:pPr algn="ctr">
+              <a:spcBef>
+                <a:spcPts val="0"/>
+              </a:spcBef>
+              <a:spcAft>
+                <a:spcPts val="0"/>
+              </a:spcAft>
+            </a:pPr>
           </a:p>
         </p:txBody>
       </p:sp>
@@ -6374,14 +6801,21 @@
               <a:lnSpc>
                 <a:spcPct val="112000"/>
               </a:lnSpc>
+              <a:spcBef>
+                <a:spcPts val="0"/>
+              </a:spcBef>
+              <a:spcAft>
+                <a:spcPts val="0"/>
+              </a:spcAft>
             </a:pPr>
             <a:r>
-              <a:rPr sz="1350" b="1" i="0">
+              <a:rPr sz="1350" b="1" i="0" lang="zh-CN" altLang="zh-CN">
                 <a:solidFill>
                   <a:srgbClr val="262626"/>
                 </a:solidFill>
                 <a:latin typeface="Microsoft YaHei"/>
                 <a:ea typeface="Microsoft YaHei"/>
+                <a:cs typeface="Microsoft YaHei"/>
               </a:rPr>
               <a:t>五、关键挑战</a:t>
             </a:r>
@@ -6414,14 +6848,21 @@
               <a:lnSpc>
                 <a:spcPct val="118000"/>
               </a:lnSpc>
+              <a:spcBef>
+                <a:spcPts val="0"/>
+              </a:spcBef>
+              <a:spcAft>
+                <a:spcPts val="0"/>
+              </a:spcAft>
             </a:pPr>
             <a:r>
-              <a:rPr sz="980" b="0" i="0">
+              <a:rPr sz="980" b="0" i="0" lang="zh-CN" altLang="zh-CN">
                 <a:solidFill>
                   <a:srgbClr val="262626"/>
                 </a:solidFill>
                 <a:latin typeface="Microsoft YaHei"/>
                 <a:ea typeface="Microsoft YaHei"/>
+                <a:cs typeface="Microsoft YaHei"/>
               </a:rPr>
               <a:t>联合寻优需在毫秒级完成配比切换且不引入下行抖动; 策略须在多变信道与业务分布下保持鲁棒; 并要与现网调度器平滑兼容、支持灰度与回退, 工程落地复杂度高。</a:t>
             </a:r>
@@ -6472,7 +6913,14 @@
           <a:bodyPr rtlCol="0" anchor="ctr"/>
           <a:lstStyle/>
           <a:p>
-            <a:pPr algn="ctr"/>
+            <a:pPr algn="ctr">
+              <a:spcBef>
+                <a:spcPts val="0"/>
+              </a:spcBef>
+              <a:spcAft>
+                <a:spcPts val="0"/>
+              </a:spcAft>
+            </a:pPr>
           </a:p>
         </p:txBody>
       </p:sp>
@@ -6592,7 +7040,14 @@
           <a:bodyPr rtlCol="0" anchor="ctr"/>
           <a:lstStyle/>
           <a:p>
-            <a:pPr algn="ctr"/>
+            <a:pPr algn="ctr">
+              <a:spcBef>
+                <a:spcPts val="0"/>
+              </a:spcBef>
+              <a:spcAft>
+                <a:spcPts val="0"/>
+              </a:spcAft>
+            </a:pPr>
           </a:p>
         </p:txBody>
       </p:sp>
@@ -6636,7 +7091,14 @@
           <a:bodyPr rtlCol="0" anchor="ctr"/>
           <a:lstStyle/>
           <a:p>
-            <a:pPr algn="ctr"/>
+            <a:pPr algn="ctr">
+              <a:spcBef>
+                <a:spcPts val="0"/>
+              </a:spcBef>
+              <a:spcAft>
+                <a:spcPts val="0"/>
+              </a:spcAft>
+            </a:pPr>
           </a:p>
         </p:txBody>
       </p:sp>
@@ -6684,7 +7146,14 @@
           <a:bodyPr rtlCol="0" anchor="ctr"/>
           <a:lstStyle/>
           <a:p>
-            <a:pPr algn="ctr"/>
+            <a:pPr algn="ctr">
+              <a:spcBef>
+                <a:spcPts val="0"/>
+              </a:spcBef>
+              <a:spcAft>
+                <a:spcPts val="0"/>
+              </a:spcAft>
+            </a:pPr>
           </a:p>
         </p:txBody>
       </p:sp>
@@ -6786,14 +7255,21 @@
               <a:lnSpc>
                 <a:spcPct val="112000"/>
               </a:lnSpc>
+              <a:spcBef>
+                <a:spcPts val="0"/>
+              </a:spcBef>
+              <a:spcAft>
+                <a:spcPts val="0"/>
+              </a:spcAft>
             </a:pPr>
             <a:r>
-              <a:rPr sz="1200" b="1" i="0">
+              <a:rPr sz="1200" b="1" i="0" lang="zh-CN" altLang="zh-CN">
                 <a:solidFill>
                   <a:srgbClr val="262626"/>
                 </a:solidFill>
                 <a:latin typeface="Microsoft YaHei"/>
                 <a:ea typeface="Microsoft YaHei"/>
+                <a:cs typeface="Microsoft YaHei"/>
               </a:rPr>
               <a:t>预期收益</a:t>
             </a:r>
@@ -6803,14 +7279,21 @@
               <a:lnSpc>
                 <a:spcPct val="112000"/>
               </a:lnSpc>
+              <a:spcBef>
+                <a:spcPts val="0"/>
+              </a:spcBef>
+              <a:spcAft>
+                <a:spcPts val="0"/>
+              </a:spcAft>
             </a:pPr>
             <a:r>
-              <a:rPr sz="1200" b="1" i="0">
+              <a:rPr sz="1200" b="1" i="0" lang="zh-CN" altLang="zh-CN">
                 <a:solidFill>
                   <a:srgbClr val="262626"/>
                 </a:solidFill>
                 <a:latin typeface="Microsoft YaHei"/>
                 <a:ea typeface="Microsoft YaHei"/>
+                <a:cs typeface="Microsoft YaHei"/>
               </a:rPr>
               <a:t>(相对基线)</a:t>
             </a:r>
@@ -6861,7 +7344,14 @@
           <a:bodyPr rtlCol="0" anchor="ctr"/>
           <a:lstStyle/>
           <a:p>
-            <a:pPr algn="ctr"/>
+            <a:pPr algn="ctr">
+              <a:spcBef>
+                <a:spcPts val="0"/>
+              </a:spcBef>
+              <a:spcAft>
+                <a:spcPts val="0"/>
+              </a:spcAft>
+            </a:pPr>
           </a:p>
         </p:txBody>
       </p:sp>
@@ -6945,8 +7435,8 @@
         </p:nvSpPr>
         <p:spPr>
           <a:xfrm>
-            <a:off x="2832100" y="6108700"/>
-            <a:ext cx="685800" cy="215900"/>
+            <a:off x="2832100" y="6085205"/>
+            <a:ext cx="685800" cy="262890"/>
           </a:xfrm>
           <a:prstGeom prst="rect">
             <a:avLst/>
@@ -6963,14 +7453,21 @@
               <a:lnSpc>
                 <a:spcPct val="112000"/>
               </a:lnSpc>
+              <a:spcBef>
+                <a:spcPts val="0"/>
+              </a:spcBef>
+              <a:spcAft>
+                <a:spcPts val="0"/>
+              </a:spcAft>
             </a:pPr>
             <a:r>
-              <a:rPr sz="1520" b="1" i="0">
+              <a:rPr sz="1520" b="1" i="0" lang="zh-CN" altLang="zh-CN">
                 <a:solidFill>
                   <a:srgbClr val="B90A0A"/>
                 </a:solidFill>
                 <a:latin typeface="Microsoft YaHei"/>
                 <a:ea typeface="Microsoft YaHei"/>
+                <a:cs typeface="Microsoft YaHei"/>
               </a:rPr>
               <a:t>+20%</a:t>
             </a:r>
@@ -7003,14 +7500,21 @@
               <a:lnSpc>
                 <a:spcPct val="112000"/>
               </a:lnSpc>
+              <a:spcBef>
+                <a:spcPts val="0"/>
+              </a:spcBef>
+              <a:spcAft>
+                <a:spcPts val="0"/>
+              </a:spcAft>
             </a:pPr>
             <a:r>
-              <a:rPr sz="840" b="0" i="0">
+              <a:rPr sz="840" b="0" i="0" lang="zh-CN" altLang="zh-CN">
                 <a:solidFill>
                   <a:srgbClr val="262626"/>
                 </a:solidFill>
                 <a:latin typeface="Microsoft YaHei"/>
                 <a:ea typeface="Microsoft YaHei"/>
+                <a:cs typeface="Microsoft YaHei"/>
               </a:rPr>
               <a:t>上行容量提升</a:t>
             </a:r>
@@ -7061,7 +7565,14 @@
           <a:bodyPr rtlCol="0" anchor="ctr"/>
           <a:lstStyle/>
           <a:p>
-            <a:pPr algn="ctr"/>
+            <a:pPr algn="ctr">
+              <a:spcBef>
+                <a:spcPts val="0"/>
+              </a:spcBef>
+              <a:spcAft>
+                <a:spcPts val="0"/>
+              </a:spcAft>
+            </a:pPr>
           </a:p>
         </p:txBody>
       </p:sp>
@@ -7145,8 +7656,8 @@
         </p:nvSpPr>
         <p:spPr>
           <a:xfrm>
-            <a:off x="4660900" y="6108700"/>
-            <a:ext cx="685800" cy="215900"/>
+            <a:off x="4660900" y="6085205"/>
+            <a:ext cx="685800" cy="262890"/>
           </a:xfrm>
           <a:prstGeom prst="rect">
             <a:avLst/>
@@ -7163,14 +7674,21 @@
               <a:lnSpc>
                 <a:spcPct val="112000"/>
               </a:lnSpc>
+              <a:spcBef>
+                <a:spcPts val="0"/>
+              </a:spcBef>
+              <a:spcAft>
+                <a:spcPts val="0"/>
+              </a:spcAft>
             </a:pPr>
             <a:r>
-              <a:rPr sz="1520" b="1" i="0">
+              <a:rPr sz="1520" b="1" i="0" lang="zh-CN" altLang="zh-CN">
                 <a:solidFill>
                   <a:srgbClr val="FF8A00"/>
                 </a:solidFill>
                 <a:latin typeface="Microsoft YaHei"/>
                 <a:ea typeface="Microsoft YaHei"/>
+                <a:cs typeface="Microsoft YaHei"/>
               </a:rPr>
               <a:t>≤5%</a:t>
             </a:r>
@@ -7203,14 +7721,21 @@
               <a:lnSpc>
                 <a:spcPct val="112000"/>
               </a:lnSpc>
+              <a:spcBef>
+                <a:spcPts val="0"/>
+              </a:spcBef>
+              <a:spcAft>
+                <a:spcPts val="0"/>
+              </a:spcAft>
             </a:pPr>
             <a:r>
-              <a:rPr sz="840" b="0" i="0">
+              <a:rPr sz="840" b="0" i="0" lang="zh-CN" altLang="zh-CN">
                 <a:solidFill>
                   <a:srgbClr val="262626"/>
                 </a:solidFill>
                 <a:latin typeface="Microsoft YaHei"/>
                 <a:ea typeface="Microsoft YaHei"/>
+                <a:cs typeface="Microsoft YaHei"/>
               </a:rPr>
               <a:t>下行性能微损</a:t>
             </a:r>
@@ -7297,7 +7822,14 @@
           <a:bodyPr rtlCol="0" anchor="ctr"/>
           <a:lstStyle/>
           <a:p>
-            <a:pPr algn="ctr"/>
+            <a:pPr algn="ctr">
+              <a:spcBef>
+                <a:spcPts val="0"/>
+              </a:spcBef>
+              <a:spcAft>
+                <a:spcPts val="0"/>
+              </a:spcAft>
+            </a:pPr>
           </a:p>
         </p:txBody>
       </p:sp>
@@ -7381,8 +7913,8 @@
         </p:nvSpPr>
         <p:spPr>
           <a:xfrm>
-            <a:off x="6489700" y="6108700"/>
-            <a:ext cx="685800" cy="215900"/>
+            <a:off x="6489700" y="6085205"/>
+            <a:ext cx="685800" cy="262890"/>
           </a:xfrm>
           <a:prstGeom prst="rect">
             <a:avLst/>
@@ -7399,14 +7931,21 @@
               <a:lnSpc>
                 <a:spcPct val="112000"/>
               </a:lnSpc>
+              <a:spcBef>
+                <a:spcPts val="0"/>
+              </a:spcBef>
+              <a:spcAft>
+                <a:spcPts val="0"/>
+              </a:spcAft>
             </a:pPr>
             <a:r>
-              <a:rPr sz="1520" b="1" i="0">
+              <a:rPr sz="1520" b="1" i="0" lang="zh-CN" altLang="zh-CN">
                 <a:solidFill>
                   <a:srgbClr val="1F4E79"/>
                 </a:solidFill>
                 <a:latin typeface="Microsoft YaHei"/>
                 <a:ea typeface="Microsoft YaHei"/>
+                <a:cs typeface="Microsoft YaHei"/>
               </a:rPr>
               <a:t>-30%</a:t>
             </a:r>
@@ -7439,14 +7978,21 @@
               <a:lnSpc>
                 <a:spcPct val="112000"/>
               </a:lnSpc>
+              <a:spcBef>
+                <a:spcPts val="0"/>
+              </a:spcBef>
+              <a:spcAft>
+                <a:spcPts val="0"/>
+              </a:spcAft>
             </a:pPr>
             <a:r>
-              <a:rPr sz="840" b="0" i="0">
+              <a:rPr sz="840" b="0" i="0" lang="zh-CN" altLang="zh-CN">
                 <a:solidFill>
                   <a:srgbClr val="262626"/>
                 </a:solidFill>
                 <a:latin typeface="Microsoft YaHei"/>
                 <a:ea typeface="Microsoft YaHei"/>
+                <a:cs typeface="Microsoft YaHei"/>
               </a:rPr>
               <a:t>上行时延抖动降低</a:t>
             </a:r>
@@ -7533,7 +8079,14 @@
           <a:bodyPr rtlCol="0" anchor="ctr"/>
           <a:lstStyle/>
           <a:p>
-            <a:pPr algn="ctr"/>
+            <a:pPr algn="ctr">
+              <a:spcBef>
+                <a:spcPts val="0"/>
+              </a:spcBef>
+              <a:spcAft>
+                <a:spcPts val="0"/>
+              </a:spcAft>
+            </a:pPr>
           </a:p>
         </p:txBody>
       </p:sp>
@@ -7617,8 +8170,8 @@
         </p:nvSpPr>
         <p:spPr>
           <a:xfrm>
-            <a:off x="8318499" y="6108700"/>
-            <a:ext cx="685800" cy="215900"/>
+            <a:off x="8318499" y="6085205"/>
+            <a:ext cx="685800" cy="262890"/>
           </a:xfrm>
           <a:prstGeom prst="rect">
             <a:avLst/>
@@ -7635,14 +8188,21 @@
               <a:lnSpc>
                 <a:spcPct val="112000"/>
               </a:lnSpc>
+              <a:spcBef>
+                <a:spcPts val="0"/>
+              </a:spcBef>
+              <a:spcAft>
+                <a:spcPts val="0"/>
+              </a:spcAft>
             </a:pPr>
             <a:r>
-              <a:rPr sz="1520" b="1" i="0">
+              <a:rPr sz="1520" b="1" i="0" lang="zh-CN" altLang="zh-CN">
                 <a:solidFill>
                   <a:srgbClr val="2E8B3C"/>
                 </a:solidFill>
                 <a:latin typeface="Microsoft YaHei"/>
                 <a:ea typeface="Microsoft YaHei"/>
+                <a:cs typeface="Microsoft YaHei"/>
               </a:rPr>
               <a:t>+15%</a:t>
             </a:r>
@@ -7675,14 +8235,21 @@
               <a:lnSpc>
                 <a:spcPct val="112000"/>
               </a:lnSpc>
+              <a:spcBef>
+                <a:spcPts val="0"/>
+              </a:spcBef>
+              <a:spcAft>
+                <a:spcPts val="0"/>
+              </a:spcAft>
             </a:pPr>
             <a:r>
-              <a:rPr sz="840" b="0" i="0">
+              <a:rPr sz="840" b="0" i="0" lang="zh-CN" altLang="zh-CN">
                 <a:solidFill>
                   <a:srgbClr val="262626"/>
                 </a:solidFill>
                 <a:latin typeface="Microsoft YaHei"/>
                 <a:ea typeface="Microsoft YaHei"/>
+                <a:cs typeface="Microsoft YaHei"/>
               </a:rPr>
               <a:t>高负载小区吞吐提升</a:t>
             </a:r>
@@ -7769,7 +8336,14 @@
           <a:bodyPr rtlCol="0" anchor="ctr"/>
           <a:lstStyle/>
           <a:p>
-            <a:pPr algn="ctr"/>
+            <a:pPr algn="ctr">
+              <a:spcBef>
+                <a:spcPts val="0"/>
+              </a:spcBef>
+              <a:spcAft>
+                <a:spcPts val="0"/>
+              </a:spcAft>
+            </a:pPr>
           </a:p>
         </p:txBody>
       </p:sp>
@@ -7853,8 +8427,8 @@
         </p:nvSpPr>
         <p:spPr>
           <a:xfrm>
-            <a:off x="10147300" y="6108700"/>
-            <a:ext cx="685800" cy="215900"/>
+            <a:off x="10147300" y="6085205"/>
+            <a:ext cx="685800" cy="262890"/>
           </a:xfrm>
           <a:prstGeom prst="rect">
             <a:avLst/>
@@ -7871,14 +8445,21 @@
               <a:lnSpc>
                 <a:spcPct val="112000"/>
               </a:lnSpc>
+              <a:spcBef>
+                <a:spcPts val="0"/>
+              </a:spcBef>
+              <a:spcAft>
+                <a:spcPts val="0"/>
+              </a:spcAft>
             </a:pPr>
             <a:r>
-              <a:rPr sz="1520" b="1" i="0">
+              <a:rPr sz="1520" b="1" i="0" lang="zh-CN" altLang="zh-CN">
                 <a:solidFill>
                   <a:srgbClr val="7050A0"/>
                 </a:solidFill>
                 <a:latin typeface="Microsoft YaHei"/>
                 <a:ea typeface="Microsoft YaHei"/>
+                <a:cs typeface="Microsoft YaHei"/>
               </a:rPr>
               <a:t>99.5%+</a:t>
             </a:r>
@@ -7911,14 +8492,21 @@
               <a:lnSpc>
                 <a:spcPct val="112000"/>
               </a:lnSpc>
+              <a:spcBef>
+                <a:spcPts val="0"/>
+              </a:spcBef>
+              <a:spcAft>
+                <a:spcPts val="0"/>
+              </a:spcAft>
             </a:pPr>
             <a:r>
-              <a:rPr sz="840" b="0" i="0">
+              <a:rPr sz="840" b="0" i="0" lang="zh-CN" altLang="zh-CN">
                 <a:solidFill>
                   <a:srgbClr val="262626"/>
                 </a:solidFill>
                 <a:latin typeface="Microsoft YaHei"/>
                 <a:ea typeface="Microsoft YaHei"/>
+                <a:cs typeface="Microsoft YaHei"/>
               </a:rPr>
               <a:t>方案稳定性</a:t>
             </a:r>
